--- a/~sasano/lecture/pn2/26/P04.pptx
+++ b/~sasano/lecture/pn2/26/P04.pptx
@@ -246,7 +246,7 @@
             <a:fld id="{5572D61F-AA85-411F-B823-1B19AE9269A4}" type="datetimeFigureOut">
               <a:rPr kumimoji="1" lang="ja-JP" altLang="en-US" smtClean="0"/>
               <a:pPr/>
-              <a:t>2022/10/14</a:t>
+              <a:t>2026/9/28</a:t>
             </a:fld>
             <a:endParaRPr kumimoji="1" lang="ja-JP" altLang="en-US"/>
           </a:p>
@@ -977,7 +977,7 @@
             <a:fld id="{E90ED720-0104-4369-84BC-D37694168613}" type="datetimeFigureOut">
               <a:rPr kumimoji="1" lang="ja-JP" altLang="en-US" smtClean="0"/>
               <a:pPr/>
-              <a:t>2022/10/14</a:t>
+              <a:t>2026/9/28</a:t>
             </a:fld>
             <a:endParaRPr kumimoji="1" lang="ja-JP" altLang="en-US"/>
           </a:p>
@@ -1174,7 +1174,7 @@
             <a:fld id="{E90ED720-0104-4369-84BC-D37694168613}" type="datetimeFigureOut">
               <a:rPr kumimoji="1" lang="ja-JP" altLang="en-US" smtClean="0"/>
               <a:pPr/>
-              <a:t>2022/10/14</a:t>
+              <a:t>2026/9/28</a:t>
             </a:fld>
             <a:endParaRPr kumimoji="1" lang="ja-JP" altLang="en-US"/>
           </a:p>
@@ -1381,7 +1381,7 @@
             <a:fld id="{E90ED720-0104-4369-84BC-D37694168613}" type="datetimeFigureOut">
               <a:rPr kumimoji="1" lang="ja-JP" altLang="en-US" smtClean="0"/>
               <a:pPr/>
-              <a:t>2022/10/14</a:t>
+              <a:t>2026/9/28</a:t>
             </a:fld>
             <a:endParaRPr kumimoji="1" lang="ja-JP" altLang="en-US"/>
           </a:p>
@@ -1578,7 +1578,7 @@
             <a:fld id="{E90ED720-0104-4369-84BC-D37694168613}" type="datetimeFigureOut">
               <a:rPr kumimoji="1" lang="ja-JP" altLang="en-US" smtClean="0"/>
               <a:pPr/>
-              <a:t>2022/10/14</a:t>
+              <a:t>2026/9/28</a:t>
             </a:fld>
             <a:endParaRPr kumimoji="1" lang="ja-JP" altLang="en-US"/>
           </a:p>
@@ -1820,7 +1820,7 @@
             <a:fld id="{E90ED720-0104-4369-84BC-D37694168613}" type="datetimeFigureOut">
               <a:rPr kumimoji="1" lang="ja-JP" altLang="en-US" smtClean="0"/>
               <a:pPr/>
-              <a:t>2022/10/14</a:t>
+              <a:t>2026/9/28</a:t>
             </a:fld>
             <a:endParaRPr kumimoji="1" lang="ja-JP" altLang="en-US"/>
           </a:p>
@@ -2166,7 +2166,7 @@
             <a:fld id="{E90ED720-0104-4369-84BC-D37694168613}" type="datetimeFigureOut">
               <a:rPr kumimoji="1" lang="ja-JP" altLang="en-US" smtClean="0"/>
               <a:pPr/>
-              <a:t>2022/10/14</a:t>
+              <a:t>2026/9/28</a:t>
             </a:fld>
             <a:endParaRPr kumimoji="1" lang="ja-JP" altLang="en-US"/>
           </a:p>
@@ -2646,7 +2646,7 @@
             <a:fld id="{E90ED720-0104-4369-84BC-D37694168613}" type="datetimeFigureOut">
               <a:rPr kumimoji="1" lang="ja-JP" altLang="en-US" smtClean="0"/>
               <a:pPr/>
-              <a:t>2022/10/14</a:t>
+              <a:t>2026/9/28</a:t>
             </a:fld>
             <a:endParaRPr kumimoji="1" lang="ja-JP" altLang="en-US"/>
           </a:p>
@@ -2760,7 +2760,7 @@
             <a:fld id="{E90ED720-0104-4369-84BC-D37694168613}" type="datetimeFigureOut">
               <a:rPr kumimoji="1" lang="ja-JP" altLang="en-US" smtClean="0"/>
               <a:pPr/>
-              <a:t>2022/10/14</a:t>
+              <a:t>2026/9/28</a:t>
             </a:fld>
             <a:endParaRPr kumimoji="1" lang="ja-JP" altLang="en-US"/>
           </a:p>
@@ -2852,7 +2852,7 @@
             <a:fld id="{E90ED720-0104-4369-84BC-D37694168613}" type="datetimeFigureOut">
               <a:rPr kumimoji="1" lang="ja-JP" altLang="en-US" smtClean="0"/>
               <a:pPr/>
-              <a:t>2022/10/14</a:t>
+              <a:t>2026/9/28</a:t>
             </a:fld>
             <a:endParaRPr kumimoji="1" lang="ja-JP" altLang="en-US"/>
           </a:p>
@@ -3156,7 +3156,7 @@
             <a:fld id="{E90ED720-0104-4369-84BC-D37694168613}" type="datetimeFigureOut">
               <a:rPr kumimoji="1" lang="ja-JP" altLang="en-US" smtClean="0"/>
               <a:pPr/>
-              <a:t>2022/10/14</a:t>
+              <a:t>2026/9/28</a:t>
             </a:fld>
             <a:endParaRPr kumimoji="1" lang="ja-JP" altLang="en-US"/>
           </a:p>
@@ -3405,7 +3405,7 @@
             <a:fld id="{E90ED720-0104-4369-84BC-D37694168613}" type="datetimeFigureOut">
               <a:rPr kumimoji="1" lang="ja-JP" altLang="en-US" smtClean="0"/>
               <a:pPr/>
-              <a:t>2022/10/14</a:t>
+              <a:t>2026/9/28</a:t>
             </a:fld>
             <a:endParaRPr kumimoji="1" lang="ja-JP" altLang="en-US"/>
           </a:p>
@@ -3645,7 +3645,7 @@
             <a:fld id="{E90ED720-0104-4369-84BC-D37694168613}" type="datetimeFigureOut">
               <a:rPr kumimoji="1" lang="ja-JP" altLang="en-US" smtClean="0"/>
               <a:pPr/>
-              <a:t>2022/10/14</a:t>
+              <a:t>2026/9/28</a:t>
             </a:fld>
             <a:endParaRPr kumimoji="1" lang="ja-JP" altLang="en-US"/>
           </a:p>
@@ -4096,8 +4096,8 @@
         </p:nvSpPr>
         <p:spPr>
           <a:xfrm>
-            <a:off x="2571736" y="5570076"/>
-            <a:ext cx="3541354" cy="523220"/>
+            <a:off x="3821634" y="5667720"/>
+            <a:ext cx="1500732" cy="523220"/>
           </a:xfrm>
           <a:prstGeom prst="rect">
             <a:avLst/>
@@ -4110,9 +4110,14 @@
           </a:bodyPr>
           <a:lstStyle/>
           <a:p>
+            <a:pPr algn="ctr"/>
+            <a:r>
+              <a:rPr kumimoji="1" lang="ja-JP" altLang="en-US" sz="2800"/>
+              <a:t>篠埜　</a:t>
+            </a:r>
             <a:r>
               <a:rPr kumimoji="1" lang="ja-JP" altLang="en-US" sz="2800" dirty="0"/>
-              <a:t>情報工学科   篠埜　功</a:t>
+              <a:t>功</a:t>
             </a:r>
           </a:p>
         </p:txBody>
